--- a/doc/LABORA_Presentacion_SOA.pptx
+++ b/doc/LABORA_Presentacion_SOA.pptx
@@ -5,7 +5,7 @@
     <p:sldMasterId id="2147483648" r:id="rId1"/>
   </p:sldMasterIdLst>
   <p:notesMasterIdLst>
-    <p:notesMasterId r:id="rId25"/>
+    <p:notesMasterId r:id="rId24"/>
   </p:notesMasterIdLst>
   <p:sldIdLst>
     <p:sldId id="256" r:id="rId2"/>
@@ -29,8 +29,7 @@
     <p:sldId id="274" r:id="rId20"/>
     <p:sldId id="275" r:id="rId21"/>
     <p:sldId id="277" r:id="rId22"/>
-    <p:sldId id="278" r:id="rId23"/>
-    <p:sldId id="279" r:id="rId24"/>
+    <p:sldId id="279" r:id="rId23"/>
   </p:sldIdLst>
   <p:sldSz cx="12188825" cy="6858000"/>
   <p:notesSz cx="6858000" cy="9144000"/>
@@ -230,7 +229,7 @@
           <a:p>
             <a:fld id="{0C63F879-141A-4EE1-A201-E679762A2961}" type="datetimeFigureOut">
               <a:rPr lang="es-ES" smtClean="0"/>
-              <a:t>2026/5/18</a:t>
+              <a:t>2026/5/19</a:t>
             </a:fld>
             <a:endParaRPr lang="es-ES"/>
           </a:p>
@@ -761,7 +760,7 @@
           <a:p>
             <a:fld id="{5BCAD085-E8A6-8845-BD4E-CB4CCA059FC4}" type="datetimeFigureOut">
               <a:rPr lang="en-US" smtClean="0"/>
-              <a:t>5/18/2026</a:t>
+              <a:t>5/19/2026</a:t>
             </a:fld>
             <a:endParaRPr lang="en-US"/>
           </a:p>
@@ -929,7 +928,7 @@
           <a:p>
             <a:fld id="{5BCAD085-E8A6-8845-BD4E-CB4CCA059FC4}" type="datetimeFigureOut">
               <a:rPr lang="en-US" smtClean="0"/>
-              <a:t>5/18/2026</a:t>
+              <a:t>5/19/2026</a:t>
             </a:fld>
             <a:endParaRPr lang="en-US"/>
           </a:p>
@@ -1107,7 +1106,7 @@
           <a:p>
             <a:fld id="{5BCAD085-E8A6-8845-BD4E-CB4CCA059FC4}" type="datetimeFigureOut">
               <a:rPr lang="en-US" smtClean="0"/>
-              <a:t>5/18/2026</a:t>
+              <a:t>5/19/2026</a:t>
             </a:fld>
             <a:endParaRPr lang="en-US"/>
           </a:p>
@@ -1275,7 +1274,7 @@
           <a:p>
             <a:fld id="{5BCAD085-E8A6-8845-BD4E-CB4CCA059FC4}" type="datetimeFigureOut">
               <a:rPr lang="en-US" smtClean="0"/>
-              <a:t>5/18/2026</a:t>
+              <a:t>5/19/2026</a:t>
             </a:fld>
             <a:endParaRPr lang="en-US"/>
           </a:p>
@@ -1520,7 +1519,7 @@
           <a:p>
             <a:fld id="{5BCAD085-E8A6-8845-BD4E-CB4CCA059FC4}" type="datetimeFigureOut">
               <a:rPr lang="en-US" smtClean="0"/>
-              <a:t>5/18/2026</a:t>
+              <a:t>5/19/2026</a:t>
             </a:fld>
             <a:endParaRPr lang="en-US"/>
           </a:p>
@@ -1805,7 +1804,7 @@
           <a:p>
             <a:fld id="{5BCAD085-E8A6-8845-BD4E-CB4CCA059FC4}" type="datetimeFigureOut">
               <a:rPr lang="en-US" smtClean="0"/>
-              <a:t>5/18/2026</a:t>
+              <a:t>5/19/2026</a:t>
             </a:fld>
             <a:endParaRPr lang="en-US"/>
           </a:p>
@@ -2224,7 +2223,7 @@
           <a:p>
             <a:fld id="{5BCAD085-E8A6-8845-BD4E-CB4CCA059FC4}" type="datetimeFigureOut">
               <a:rPr lang="en-US" smtClean="0"/>
-              <a:t>5/18/2026</a:t>
+              <a:t>5/19/2026</a:t>
             </a:fld>
             <a:endParaRPr lang="en-US"/>
           </a:p>
@@ -2341,7 +2340,7 @@
           <a:p>
             <a:fld id="{5BCAD085-E8A6-8845-BD4E-CB4CCA059FC4}" type="datetimeFigureOut">
               <a:rPr lang="en-US" smtClean="0"/>
-              <a:t>5/18/2026</a:t>
+              <a:t>5/19/2026</a:t>
             </a:fld>
             <a:endParaRPr lang="en-US"/>
           </a:p>
@@ -2436,7 +2435,7 @@
           <a:p>
             <a:fld id="{5BCAD085-E8A6-8845-BD4E-CB4CCA059FC4}" type="datetimeFigureOut">
               <a:rPr lang="en-US" smtClean="0"/>
-              <a:t>5/18/2026</a:t>
+              <a:t>5/19/2026</a:t>
             </a:fld>
             <a:endParaRPr lang="en-US"/>
           </a:p>
@@ -2711,7 +2710,7 @@
           <a:p>
             <a:fld id="{5BCAD085-E8A6-8845-BD4E-CB4CCA059FC4}" type="datetimeFigureOut">
               <a:rPr lang="en-US" smtClean="0"/>
-              <a:t>5/18/2026</a:t>
+              <a:t>5/19/2026</a:t>
             </a:fld>
             <a:endParaRPr lang="en-US"/>
           </a:p>
@@ -2963,7 +2962,7 @@
           <a:p>
             <a:fld id="{5BCAD085-E8A6-8845-BD4E-CB4CCA059FC4}" type="datetimeFigureOut">
               <a:rPr lang="en-US" smtClean="0"/>
-              <a:t>5/18/2026</a:t>
+              <a:t>5/19/2026</a:t>
             </a:fld>
             <a:endParaRPr lang="en-US"/>
           </a:p>
@@ -3174,7 +3173,7 @@
           <a:p>
             <a:fld id="{5BCAD085-E8A6-8845-BD4E-CB4CCA059FC4}" type="datetimeFigureOut">
               <a:rPr lang="en-US" smtClean="0"/>
-              <a:t>5/18/2026</a:t>
+              <a:t>5/19/2026</a:t>
             </a:fld>
             <a:endParaRPr lang="en-US"/>
           </a:p>
@@ -25887,13 +25886,13 @@
       </p:sp>
       <p:sp>
         <p:nvSpPr>
-          <p:cNvPr id="66" name="Rectangle 65"/>
+          <p:cNvPr id="69" name="Rectangle 68"/>
           <p:cNvSpPr/>
           <p:nvPr/>
         </p:nvSpPr>
         <p:spPr>
           <a:xfrm>
-            <a:off x="6400800" y="4910327"/>
+            <a:off x="6400800" y="4983479"/>
             <a:ext cx="438912" cy="347472"/>
           </a:xfrm>
           <a:prstGeom prst="rect">
@@ -25931,13 +25930,13 @@
       </p:sp>
       <p:sp>
         <p:nvSpPr>
-          <p:cNvPr id="67" name="TextBox 66"/>
-          <p:cNvSpPr txBox="1"/>
-          <p:nvPr/>
-        </p:nvSpPr>
-        <p:spPr>
-          <a:xfrm>
-            <a:off x="6400800" y="4956047"/>
+          <p:cNvPr id="70" name="TextBox 69"/>
+          <p:cNvSpPr txBox="1"/>
+          <p:nvPr/>
+        </p:nvSpPr>
+        <p:spPr>
+          <a:xfrm>
+            <a:off x="6400800" y="5041910"/>
             <a:ext cx="438912" cy="261610"/>
           </a:xfrm>
           <a:prstGeom prst="rect">
@@ -25970,135 +25969,13 @@
       </p:sp>
       <p:sp>
         <p:nvSpPr>
-          <p:cNvPr id="68" name="TextBox 67"/>
-          <p:cNvSpPr txBox="1"/>
-          <p:nvPr/>
-        </p:nvSpPr>
-        <p:spPr>
-          <a:xfrm>
-            <a:off x="6949440" y="4965191"/>
-            <a:ext cx="4937760" cy="292388"/>
-          </a:xfrm>
-          <a:prstGeom prst="rect">
-            <a:avLst/>
-          </a:prstGeom>
-          <a:noFill/>
-        </p:spPr>
-        <p:txBody>
-          <a:bodyPr wrap="square">
-            <a:spAutoFit/>
-          </a:bodyPr>
-          <a:lstStyle/>
-          <a:p>
-            <a:pPr algn="l"/>
-            <a:r>
-              <a:rPr lang="es-ES" sz="1300" b="0" i="0" dirty="0">
-                <a:solidFill>
-                  <a:srgbClr val="1A1A2E"/>
-                </a:solidFill>
-              </a:rPr>
-              <a:t>Demostración(demo)</a:t>
-            </a:r>
-            <a:endParaRPr sz="1300" b="0" i="0" dirty="0">
-              <a:solidFill>
-                <a:srgbClr val="1A1A2E"/>
-              </a:solidFill>
-            </a:endParaRPr>
-          </a:p>
-        </p:txBody>
-      </p:sp>
-      <p:sp>
-        <p:nvSpPr>
-          <p:cNvPr id="69" name="Rectangle 68"/>
-          <p:cNvSpPr/>
-          <p:nvPr/>
-        </p:nvSpPr>
-        <p:spPr>
-          <a:xfrm>
-            <a:off x="6400800" y="5431536"/>
-            <a:ext cx="438912" cy="347472"/>
-          </a:xfrm>
-          <a:prstGeom prst="rect">
-            <a:avLst/>
-          </a:prstGeom>
-          <a:solidFill>
-            <a:srgbClr val="0052A5"/>
-          </a:solidFill>
-          <a:ln>
-            <a:noFill/>
-          </a:ln>
-        </p:spPr>
-        <p:style>
-          <a:lnRef idx="1">
-            <a:schemeClr val="accent1"/>
-          </a:lnRef>
-          <a:fillRef idx="3">
-            <a:schemeClr val="accent1"/>
-          </a:fillRef>
-          <a:effectRef idx="2">
-            <a:schemeClr val="accent1"/>
-          </a:effectRef>
-          <a:fontRef idx="minor">
-            <a:schemeClr val="lt1"/>
-          </a:fontRef>
-        </p:style>
-        <p:txBody>
-          <a:bodyPr rtlCol="0" anchor="ctr"/>
-          <a:lstStyle/>
-          <a:p>
-            <a:pPr algn="ctr"/>
-            <a:endParaRPr/>
-          </a:p>
-        </p:txBody>
-      </p:sp>
-      <p:sp>
-        <p:nvSpPr>
-          <p:cNvPr id="70" name="TextBox 69"/>
-          <p:cNvSpPr txBox="1"/>
-          <p:nvPr/>
-        </p:nvSpPr>
-        <p:spPr>
-          <a:xfrm>
-            <a:off x="6400800" y="5477255"/>
-            <a:ext cx="438912" cy="261610"/>
-          </a:xfrm>
-          <a:prstGeom prst="rect">
-            <a:avLst/>
-          </a:prstGeom>
-          <a:noFill/>
-        </p:spPr>
-        <p:txBody>
-          <a:bodyPr wrap="square">
-            <a:spAutoFit/>
-          </a:bodyPr>
-          <a:lstStyle/>
-          <a:p>
-            <a:pPr algn="ctr"/>
-            <a:r>
-              <a:rPr lang="es-ES" sz="1100" b="1" i="0" dirty="0">
-                <a:solidFill>
-                  <a:srgbClr val="FFFFFF"/>
-                </a:solidFill>
-              </a:rPr>
-              <a:t>24</a:t>
-            </a:r>
-            <a:endParaRPr sz="1100" b="1" i="0" dirty="0">
-              <a:solidFill>
-                <a:srgbClr val="FFFFFF"/>
-              </a:solidFill>
-            </a:endParaRPr>
-          </a:p>
-        </p:txBody>
-      </p:sp>
-      <p:sp>
-        <p:nvSpPr>
           <p:cNvPr id="71" name="TextBox 70"/>
           <p:cNvSpPr txBox="1"/>
           <p:nvPr/>
         </p:nvSpPr>
         <p:spPr>
           <a:xfrm>
-            <a:off x="6949440" y="5486399"/>
+            <a:off x="6949440" y="5056851"/>
             <a:ext cx="4937760" cy="292388"/>
           </a:xfrm>
           <a:prstGeom prst="rect">
@@ -29875,1327 +29752,6 @@
             <a:avLst/>
           </a:prstGeom>
           <a:solidFill>
-            <a:srgbClr val="F0F4F8"/>
-          </a:solidFill>
-          <a:ln>
-            <a:noFill/>
-          </a:ln>
-        </p:spPr>
-        <p:style>
-          <a:lnRef idx="1">
-            <a:schemeClr val="accent1"/>
-          </a:lnRef>
-          <a:fillRef idx="3">
-            <a:schemeClr val="accent1"/>
-          </a:fillRef>
-          <a:effectRef idx="2">
-            <a:schemeClr val="accent1"/>
-          </a:effectRef>
-          <a:fontRef idx="minor">
-            <a:schemeClr val="lt1"/>
-          </a:fontRef>
-        </p:style>
-        <p:txBody>
-          <a:bodyPr rtlCol="0" anchor="ctr"/>
-          <a:lstStyle/>
-          <a:p>
-            <a:pPr algn="ctr"/>
-            <a:endParaRPr/>
-          </a:p>
-        </p:txBody>
-      </p:sp>
-      <p:sp>
-        <p:nvSpPr>
-          <p:cNvPr id="3" name="Rectangle 2"/>
-          <p:cNvSpPr/>
-          <p:nvPr/>
-        </p:nvSpPr>
-        <p:spPr>
-          <a:xfrm>
-            <a:off x="0" y="0"/>
-            <a:ext cx="12188952" cy="1005840"/>
-          </a:xfrm>
-          <a:prstGeom prst="rect">
-            <a:avLst/>
-          </a:prstGeom>
-          <a:solidFill>
-            <a:srgbClr val="002B6A"/>
-          </a:solidFill>
-          <a:ln>
-            <a:noFill/>
-          </a:ln>
-        </p:spPr>
-        <p:style>
-          <a:lnRef idx="1">
-            <a:schemeClr val="accent1"/>
-          </a:lnRef>
-          <a:fillRef idx="3">
-            <a:schemeClr val="accent1"/>
-          </a:fillRef>
-          <a:effectRef idx="2">
-            <a:schemeClr val="accent1"/>
-          </a:effectRef>
-          <a:fontRef idx="minor">
-            <a:schemeClr val="lt1"/>
-          </a:fontRef>
-        </p:style>
-        <p:txBody>
-          <a:bodyPr rtlCol="0" anchor="ctr"/>
-          <a:lstStyle/>
-          <a:p>
-            <a:pPr algn="ctr"/>
-            <a:endParaRPr/>
-          </a:p>
-        </p:txBody>
-      </p:sp>
-      <p:sp>
-        <p:nvSpPr>
-          <p:cNvPr id="4" name="Rectangle 3"/>
-          <p:cNvSpPr/>
-          <p:nvPr/>
-        </p:nvSpPr>
-        <p:spPr>
-          <a:xfrm>
-            <a:off x="0" y="960120"/>
-            <a:ext cx="12188952" cy="73152"/>
-          </a:xfrm>
-          <a:prstGeom prst="rect">
-            <a:avLst/>
-          </a:prstGeom>
-          <a:solidFill>
-            <a:srgbClr val="FF6600"/>
-          </a:solidFill>
-          <a:ln>
-            <a:noFill/>
-          </a:ln>
-        </p:spPr>
-        <p:style>
-          <a:lnRef idx="1">
-            <a:schemeClr val="accent1"/>
-          </a:lnRef>
-          <a:fillRef idx="3">
-            <a:schemeClr val="accent1"/>
-          </a:fillRef>
-          <a:effectRef idx="2">
-            <a:schemeClr val="accent1"/>
-          </a:effectRef>
-          <a:fontRef idx="minor">
-            <a:schemeClr val="lt1"/>
-          </a:fontRef>
-        </p:style>
-        <p:txBody>
-          <a:bodyPr rtlCol="0" anchor="ctr"/>
-          <a:lstStyle/>
-          <a:p>
-            <a:pPr algn="ctr"/>
-            <a:endParaRPr/>
-          </a:p>
-        </p:txBody>
-      </p:sp>
-      <p:sp>
-        <p:nvSpPr>
-          <p:cNvPr id="5" name="TextBox 4"/>
-          <p:cNvSpPr txBox="1"/>
-          <p:nvPr/>
-        </p:nvSpPr>
-        <p:spPr>
-          <a:xfrm>
-            <a:off x="320040" y="91440"/>
-            <a:ext cx="10058400" cy="548640"/>
-          </a:xfrm>
-          <a:prstGeom prst="rect">
-            <a:avLst/>
-          </a:prstGeom>
-          <a:noFill/>
-        </p:spPr>
-        <p:txBody>
-          <a:bodyPr wrap="square">
-            <a:spAutoFit/>
-          </a:bodyPr>
-          <a:lstStyle/>
-          <a:p>
-            <a:pPr algn="l"/>
-            <a:r>
-              <a:rPr sz="2800" b="1" i="0">
-                <a:solidFill>
-                  <a:srgbClr val="FFFFFF"/>
-                </a:solidFill>
-              </a:rPr>
-              <a:t>Demostración</a:t>
-            </a:r>
-          </a:p>
-        </p:txBody>
-      </p:sp>
-      <p:sp>
-        <p:nvSpPr>
-          <p:cNvPr id="6" name="TextBox 5"/>
-          <p:cNvSpPr txBox="1"/>
-          <p:nvPr/>
-        </p:nvSpPr>
-        <p:spPr>
-          <a:xfrm>
-            <a:off x="320040" y="594360"/>
-            <a:ext cx="10058400" cy="347472"/>
-          </a:xfrm>
-          <a:prstGeom prst="rect">
-            <a:avLst/>
-          </a:prstGeom>
-          <a:noFill/>
-        </p:spPr>
-        <p:txBody>
-          <a:bodyPr wrap="square">
-            <a:spAutoFit/>
-          </a:bodyPr>
-          <a:lstStyle/>
-          <a:p>
-            <a:pPr algn="l"/>
-            <a:r>
-              <a:rPr sz="1300" b="0" i="1">
-                <a:solidFill>
-                  <a:srgbClr val="CCD6E0"/>
-                </a:solidFill>
-              </a:rPr>
-              <a:t>Escenario completo: empresa publica oferta → candidatos son notificados</a:t>
-            </a:r>
-          </a:p>
-        </p:txBody>
-      </p:sp>
-      <p:sp>
-        <p:nvSpPr>
-          <p:cNvPr id="7" name="Rectangle 6"/>
-          <p:cNvSpPr/>
-          <p:nvPr/>
-        </p:nvSpPr>
-        <p:spPr>
-          <a:xfrm>
-            <a:off x="0" y="6583680"/>
-            <a:ext cx="12188952" cy="274320"/>
-          </a:xfrm>
-          <a:prstGeom prst="rect">
-            <a:avLst/>
-          </a:prstGeom>
-          <a:solidFill>
-            <a:srgbClr val="002B6A"/>
-          </a:solidFill>
-          <a:ln>
-            <a:noFill/>
-          </a:ln>
-        </p:spPr>
-        <p:style>
-          <a:lnRef idx="1">
-            <a:schemeClr val="accent1"/>
-          </a:lnRef>
-          <a:fillRef idx="3">
-            <a:schemeClr val="accent1"/>
-          </a:fillRef>
-          <a:effectRef idx="2">
-            <a:schemeClr val="accent1"/>
-          </a:effectRef>
-          <a:fontRef idx="minor">
-            <a:schemeClr val="lt1"/>
-          </a:fontRef>
-        </p:style>
-        <p:txBody>
-          <a:bodyPr rtlCol="0" anchor="ctr"/>
-          <a:lstStyle/>
-          <a:p>
-            <a:pPr algn="ctr"/>
-            <a:endParaRPr/>
-          </a:p>
-        </p:txBody>
-      </p:sp>
-      <p:sp>
-        <p:nvSpPr>
-          <p:cNvPr id="8" name="TextBox 7"/>
-          <p:cNvSpPr txBox="1"/>
-          <p:nvPr/>
-        </p:nvSpPr>
-        <p:spPr>
-          <a:xfrm>
-            <a:off x="274320" y="6601968"/>
-            <a:ext cx="8229600" cy="228600"/>
-          </a:xfrm>
-          <a:prstGeom prst="rect">
-            <a:avLst/>
-          </a:prstGeom>
-          <a:noFill/>
-        </p:spPr>
-        <p:txBody>
-          <a:bodyPr wrap="square">
-            <a:spAutoFit/>
-          </a:bodyPr>
-          <a:lstStyle/>
-          <a:p>
-            <a:pPr algn="l"/>
-            <a:r>
-              <a:rPr sz="900" b="0" i="0">
-                <a:solidFill>
-                  <a:srgbClr val="CCD6E0"/>
-                </a:solidFill>
-              </a:rPr>
-              <a:t>LABORA – Integración de Sistemas SOA  |  MTIS – Grupo 7</a:t>
-            </a:r>
-          </a:p>
-        </p:txBody>
-      </p:sp>
-      <p:sp>
-        <p:nvSpPr>
-          <p:cNvPr id="9" name="TextBox 8"/>
-          <p:cNvSpPr txBox="1"/>
-          <p:nvPr/>
-        </p:nvSpPr>
-        <p:spPr>
-          <a:xfrm>
-            <a:off x="11247120" y="6601968"/>
-            <a:ext cx="822960" cy="228600"/>
-          </a:xfrm>
-          <a:prstGeom prst="rect">
-            <a:avLst/>
-          </a:prstGeom>
-          <a:noFill/>
-        </p:spPr>
-        <p:txBody>
-          <a:bodyPr wrap="square">
-            <a:spAutoFit/>
-          </a:bodyPr>
-          <a:lstStyle/>
-          <a:p>
-            <a:pPr algn="r"/>
-            <a:r>
-              <a:rPr sz="900" b="0" i="0">
-                <a:solidFill>
-                  <a:srgbClr val="CCD6E0"/>
-                </a:solidFill>
-              </a:rPr>
-              <a:t>23/24</a:t>
-            </a:r>
-          </a:p>
-        </p:txBody>
-      </p:sp>
-      <p:sp>
-        <p:nvSpPr>
-          <p:cNvPr id="10" name="Rectangle 9"/>
-          <p:cNvSpPr/>
-          <p:nvPr/>
-        </p:nvSpPr>
-        <p:spPr>
-          <a:xfrm>
-            <a:off x="320040" y="1234440"/>
-            <a:ext cx="3840480" cy="438912"/>
-          </a:xfrm>
-          <a:prstGeom prst="rect">
-            <a:avLst/>
-          </a:prstGeom>
-          <a:solidFill>
-            <a:srgbClr val="0052A5"/>
-          </a:solidFill>
-          <a:ln>
-            <a:noFill/>
-          </a:ln>
-        </p:spPr>
-        <p:style>
-          <a:lnRef idx="1">
-            <a:schemeClr val="accent1"/>
-          </a:lnRef>
-          <a:fillRef idx="3">
-            <a:schemeClr val="accent1"/>
-          </a:fillRef>
-          <a:effectRef idx="2">
-            <a:schemeClr val="accent1"/>
-          </a:effectRef>
-          <a:fontRef idx="minor">
-            <a:schemeClr val="lt1"/>
-          </a:fontRef>
-        </p:style>
-        <p:txBody>
-          <a:bodyPr rtlCol="0" anchor="ctr"/>
-          <a:lstStyle/>
-          <a:p>
-            <a:pPr algn="ctr"/>
-            <a:endParaRPr/>
-          </a:p>
-        </p:txBody>
-      </p:sp>
-      <p:sp>
-        <p:nvSpPr>
-          <p:cNvPr id="11" name="TextBox 10"/>
-          <p:cNvSpPr txBox="1"/>
-          <p:nvPr/>
-        </p:nvSpPr>
-        <p:spPr>
-          <a:xfrm>
-            <a:off x="411479" y="1261872"/>
-            <a:ext cx="3657600" cy="384048"/>
-          </a:xfrm>
-          <a:prstGeom prst="rect">
-            <a:avLst/>
-          </a:prstGeom>
-          <a:noFill/>
-        </p:spPr>
-        <p:txBody>
-          <a:bodyPr wrap="square">
-            <a:spAutoFit/>
-          </a:bodyPr>
-          <a:lstStyle/>
-          <a:p>
-            <a:pPr algn="l"/>
-            <a:r>
-              <a:rPr sz="1300" b="1" i="0">
-                <a:solidFill>
-                  <a:srgbClr val="FFFFFF"/>
-                </a:solidFill>
-              </a:rPr>
-              <a:t>Escenario 1 – Demandante</a:t>
-            </a:r>
-          </a:p>
-        </p:txBody>
-      </p:sp>
-      <p:sp>
-        <p:nvSpPr>
-          <p:cNvPr id="12" name="Rectangle 11"/>
-          <p:cNvSpPr/>
-          <p:nvPr/>
-        </p:nvSpPr>
-        <p:spPr>
-          <a:xfrm>
-            <a:off x="320040" y="1673352"/>
-            <a:ext cx="3840480" cy="4681728"/>
-          </a:xfrm>
-          <a:prstGeom prst="rect">
-            <a:avLst/>
-          </a:prstGeom>
-          <a:solidFill>
-            <a:srgbClr val="FFFFFF"/>
-          </a:solidFill>
-          <a:ln w="12700">
-            <a:solidFill>
-              <a:srgbClr val="CCD6E0"/>
-            </a:solidFill>
-          </a:ln>
-        </p:spPr>
-        <p:style>
-          <a:lnRef idx="1">
-            <a:schemeClr val="accent1"/>
-          </a:lnRef>
-          <a:fillRef idx="3">
-            <a:schemeClr val="accent1"/>
-          </a:fillRef>
-          <a:effectRef idx="2">
-            <a:schemeClr val="accent1"/>
-          </a:effectRef>
-          <a:fontRef idx="minor">
-            <a:schemeClr val="lt1"/>
-          </a:fontRef>
-        </p:style>
-        <p:txBody>
-          <a:bodyPr rtlCol="0" anchor="ctr"/>
-          <a:lstStyle/>
-          <a:p>
-            <a:pPr algn="ctr"/>
-            <a:endParaRPr/>
-          </a:p>
-        </p:txBody>
-      </p:sp>
-      <p:sp>
-        <p:nvSpPr>
-          <p:cNvPr id="13" name="TextBox 12"/>
-          <p:cNvSpPr txBox="1"/>
-          <p:nvPr/>
-        </p:nvSpPr>
-        <p:spPr>
-          <a:xfrm>
-            <a:off x="457200" y="1792224"/>
-            <a:ext cx="3566160" cy="658368"/>
-          </a:xfrm>
-          <a:prstGeom prst="rect">
-            <a:avLst/>
-          </a:prstGeom>
-          <a:noFill/>
-        </p:spPr>
-        <p:txBody>
-          <a:bodyPr wrap="square">
-            <a:spAutoFit/>
-          </a:bodyPr>
-          <a:lstStyle/>
-          <a:p>
-            <a:pPr algn="l"/>
-            <a:r>
-              <a:rPr sz="1200" b="0" i="0">
-                <a:solidFill>
-                  <a:srgbClr val="1A1A2E"/>
-                </a:solidFill>
-              </a:rPr>
-              <a:t>1. Login con NIF + contraseña  (SOAP: AutenticarUsuario)</a:t>
-            </a:r>
-          </a:p>
-        </p:txBody>
-      </p:sp>
-      <p:sp>
-        <p:nvSpPr>
-          <p:cNvPr id="14" name="TextBox 13"/>
-          <p:cNvSpPr txBox="1"/>
-          <p:nvPr/>
-        </p:nvSpPr>
-        <p:spPr>
-          <a:xfrm>
-            <a:off x="457200" y="2532888"/>
-            <a:ext cx="3566160" cy="658368"/>
-          </a:xfrm>
-          <a:prstGeom prst="rect">
-            <a:avLst/>
-          </a:prstGeom>
-          <a:noFill/>
-        </p:spPr>
-        <p:txBody>
-          <a:bodyPr wrap="square">
-            <a:spAutoFit/>
-          </a:bodyPr>
-          <a:lstStyle/>
-          <a:p>
-            <a:pPr algn="l"/>
-            <a:r>
-              <a:rPr sz="1200" b="0" i="0">
-                <a:solidFill>
-                  <a:srgbClr val="1A1A2E"/>
-                </a:solidFill>
-              </a:rPr>
-              <a:t>2. Consultar ofertas activas  (REST: GET /ofertas)</a:t>
-            </a:r>
-          </a:p>
-        </p:txBody>
-      </p:sp>
-      <p:sp>
-        <p:nvSpPr>
-          <p:cNvPr id="15" name="TextBox 14"/>
-          <p:cNvSpPr txBox="1"/>
-          <p:nvPr/>
-        </p:nvSpPr>
-        <p:spPr>
-          <a:xfrm>
-            <a:off x="457200" y="3273552"/>
-            <a:ext cx="3566160" cy="658368"/>
-          </a:xfrm>
-          <a:prstGeom prst="rect">
-            <a:avLst/>
-          </a:prstGeom>
-          <a:noFill/>
-        </p:spPr>
-        <p:txBody>
-          <a:bodyPr wrap="square">
-            <a:spAutoFit/>
-          </a:bodyPr>
-          <a:lstStyle/>
-          <a:p>
-            <a:pPr algn="l"/>
-            <a:r>
-              <a:rPr sz="1200" b="0" i="0">
-                <a:solidFill>
-                  <a:srgbClr val="1A1A2E"/>
-                </a:solidFill>
-              </a:rPr>
-              <a:t>3. Aplicar a una oferta  (REST: POST /candidaturas)</a:t>
-            </a:r>
-          </a:p>
-        </p:txBody>
-      </p:sp>
-      <p:sp>
-        <p:nvSpPr>
-          <p:cNvPr id="16" name="TextBox 15"/>
-          <p:cNvSpPr txBox="1"/>
-          <p:nvPr/>
-        </p:nvSpPr>
-        <p:spPr>
-          <a:xfrm>
-            <a:off x="457200" y="4014216"/>
-            <a:ext cx="3566160" cy="658368"/>
-          </a:xfrm>
-          <a:prstGeom prst="rect">
-            <a:avLst/>
-          </a:prstGeom>
-          <a:noFill/>
-        </p:spPr>
-        <p:txBody>
-          <a:bodyPr wrap="square">
-            <a:spAutoFit/>
-          </a:bodyPr>
-          <a:lstStyle/>
-          <a:p>
-            <a:pPr algn="l"/>
-            <a:r>
-              <a:rPr sz="1200" b="0" i="0">
-                <a:solidFill>
-                  <a:srgbClr val="1A1A2E"/>
-                </a:solidFill>
-              </a:rPr>
-              <a:t>4. Solicitar certificado de demandante  (SOAP: SolicitarCertificado)</a:t>
-            </a:r>
-          </a:p>
-        </p:txBody>
-      </p:sp>
-      <p:sp>
-        <p:nvSpPr>
-          <p:cNvPr id="17" name="TextBox 16"/>
-          <p:cNvSpPr txBox="1"/>
-          <p:nvPr/>
-        </p:nvSpPr>
-        <p:spPr>
-          <a:xfrm>
-            <a:off x="457200" y="4754880"/>
-            <a:ext cx="3566160" cy="658368"/>
-          </a:xfrm>
-          <a:prstGeom prst="rect">
-            <a:avLst/>
-          </a:prstGeom>
-          <a:noFill/>
-        </p:spPr>
-        <p:txBody>
-          <a:bodyPr wrap="square">
-            <a:spAutoFit/>
-          </a:bodyPr>
-          <a:lstStyle/>
-          <a:p>
-            <a:pPr algn="l"/>
-            <a:r>
-              <a:rPr sz="1200" b="0" i="0">
-                <a:solidFill>
-                  <a:srgbClr val="1A1A2E"/>
-                </a:solidFill>
-              </a:rPr>
-              <a:t>5. Suscribirse a alertas 'programación'  (REST: POST /suscripciones)</a:t>
-            </a:r>
-          </a:p>
-        </p:txBody>
-      </p:sp>
-      <p:sp>
-        <p:nvSpPr>
-          <p:cNvPr id="18" name="TextBox 17"/>
-          <p:cNvSpPr txBox="1"/>
-          <p:nvPr/>
-        </p:nvSpPr>
-        <p:spPr>
-          <a:xfrm>
-            <a:off x="457200" y="5495544"/>
-            <a:ext cx="3566160" cy="658368"/>
-          </a:xfrm>
-          <a:prstGeom prst="rect">
-            <a:avLst/>
-          </a:prstGeom>
-          <a:noFill/>
-        </p:spPr>
-        <p:txBody>
-          <a:bodyPr wrap="square">
-            <a:spAutoFit/>
-          </a:bodyPr>
-          <a:lstStyle/>
-          <a:p>
-            <a:pPr algn="l"/>
-            <a:r>
-              <a:rPr sz="1200" b="0" i="0">
-                <a:solidFill>
-                  <a:srgbClr val="1A1A2E"/>
-                </a:solidFill>
-              </a:rPr>
-              <a:t>6. Recibir email de preselección tras matching</a:t>
-            </a:r>
-          </a:p>
-        </p:txBody>
-      </p:sp>
-      <p:sp>
-        <p:nvSpPr>
-          <p:cNvPr id="19" name="Rectangle 18"/>
-          <p:cNvSpPr/>
-          <p:nvPr/>
-        </p:nvSpPr>
-        <p:spPr>
-          <a:xfrm>
-            <a:off x="4270248" y="1234440"/>
-            <a:ext cx="3840480" cy="438912"/>
-          </a:xfrm>
-          <a:prstGeom prst="rect">
-            <a:avLst/>
-          </a:prstGeom>
-          <a:solidFill>
-            <a:srgbClr val="27AE60"/>
-          </a:solidFill>
-          <a:ln>
-            <a:noFill/>
-          </a:ln>
-        </p:spPr>
-        <p:style>
-          <a:lnRef idx="1">
-            <a:schemeClr val="accent1"/>
-          </a:lnRef>
-          <a:fillRef idx="3">
-            <a:schemeClr val="accent1"/>
-          </a:fillRef>
-          <a:effectRef idx="2">
-            <a:schemeClr val="accent1"/>
-          </a:effectRef>
-          <a:fontRef idx="minor">
-            <a:schemeClr val="lt1"/>
-          </a:fontRef>
-        </p:style>
-        <p:txBody>
-          <a:bodyPr rtlCol="0" anchor="ctr"/>
-          <a:lstStyle/>
-          <a:p>
-            <a:pPr algn="ctr"/>
-            <a:endParaRPr/>
-          </a:p>
-        </p:txBody>
-      </p:sp>
-      <p:sp>
-        <p:nvSpPr>
-          <p:cNvPr id="20" name="TextBox 19"/>
-          <p:cNvSpPr txBox="1"/>
-          <p:nvPr/>
-        </p:nvSpPr>
-        <p:spPr>
-          <a:xfrm>
-            <a:off x="4361688" y="1261872"/>
-            <a:ext cx="3657600" cy="384048"/>
-          </a:xfrm>
-          <a:prstGeom prst="rect">
-            <a:avLst/>
-          </a:prstGeom>
-          <a:noFill/>
-        </p:spPr>
-        <p:txBody>
-          <a:bodyPr wrap="square">
-            <a:spAutoFit/>
-          </a:bodyPr>
-          <a:lstStyle/>
-          <a:p>
-            <a:pPr algn="l"/>
-            <a:r>
-              <a:rPr sz="1300" b="1" i="0">
-                <a:solidFill>
-                  <a:srgbClr val="FFFFFF"/>
-                </a:solidFill>
-              </a:rPr>
-              <a:t>Escenario 2 – Empresa</a:t>
-            </a:r>
-          </a:p>
-        </p:txBody>
-      </p:sp>
-      <p:sp>
-        <p:nvSpPr>
-          <p:cNvPr id="21" name="Rectangle 20"/>
-          <p:cNvSpPr/>
-          <p:nvPr/>
-        </p:nvSpPr>
-        <p:spPr>
-          <a:xfrm>
-            <a:off x="4270248" y="1673352"/>
-            <a:ext cx="3840480" cy="4681728"/>
-          </a:xfrm>
-          <a:prstGeom prst="rect">
-            <a:avLst/>
-          </a:prstGeom>
-          <a:solidFill>
-            <a:srgbClr val="FFFFFF"/>
-          </a:solidFill>
-          <a:ln w="12700">
-            <a:solidFill>
-              <a:srgbClr val="CCD6E0"/>
-            </a:solidFill>
-          </a:ln>
-        </p:spPr>
-        <p:style>
-          <a:lnRef idx="1">
-            <a:schemeClr val="accent1"/>
-          </a:lnRef>
-          <a:fillRef idx="3">
-            <a:schemeClr val="accent1"/>
-          </a:fillRef>
-          <a:effectRef idx="2">
-            <a:schemeClr val="accent1"/>
-          </a:effectRef>
-          <a:fontRef idx="minor">
-            <a:schemeClr val="lt1"/>
-          </a:fontRef>
-        </p:style>
-        <p:txBody>
-          <a:bodyPr rtlCol="0" anchor="ctr"/>
-          <a:lstStyle/>
-          <a:p>
-            <a:pPr algn="ctr"/>
-            <a:endParaRPr/>
-          </a:p>
-        </p:txBody>
-      </p:sp>
-      <p:sp>
-        <p:nvSpPr>
-          <p:cNvPr id="22" name="TextBox 21"/>
-          <p:cNvSpPr txBox="1"/>
-          <p:nvPr/>
-        </p:nvSpPr>
-        <p:spPr>
-          <a:xfrm>
-            <a:off x="4407408" y="1792224"/>
-            <a:ext cx="3566160" cy="658368"/>
-          </a:xfrm>
-          <a:prstGeom prst="rect">
-            <a:avLst/>
-          </a:prstGeom>
-          <a:noFill/>
-        </p:spPr>
-        <p:txBody>
-          <a:bodyPr wrap="square">
-            <a:spAutoFit/>
-          </a:bodyPr>
-          <a:lstStyle/>
-          <a:p>
-            <a:pPr algn="l"/>
-            <a:r>
-              <a:rPr sz="1200" b="0" i="0">
-                <a:solidFill>
-                  <a:srgbClr val="1A1A2E"/>
-                </a:solidFill>
-              </a:rPr>
-              <a:t>1. Login como REPRESENTANTE  (SOAP: AutenticarUsuario)</a:t>
-            </a:r>
-          </a:p>
-        </p:txBody>
-      </p:sp>
-      <p:sp>
-        <p:nvSpPr>
-          <p:cNvPr id="23" name="TextBox 22"/>
-          <p:cNvSpPr txBox="1"/>
-          <p:nvPr/>
-        </p:nvSpPr>
-        <p:spPr>
-          <a:xfrm>
-            <a:off x="4407408" y="2532888"/>
-            <a:ext cx="3566160" cy="658368"/>
-          </a:xfrm>
-          <a:prstGeom prst="rect">
-            <a:avLst/>
-          </a:prstGeom>
-          <a:noFill/>
-        </p:spPr>
-        <p:txBody>
-          <a:bodyPr wrap="square">
-            <a:spAutoFit/>
-          </a:bodyPr>
-          <a:lstStyle/>
-          <a:p>
-            <a:pPr algn="l"/>
-            <a:r>
-              <a:rPr sz="1200" b="0" i="0">
-                <a:solidFill>
-                  <a:srgbClr val="1A1A2E"/>
-                </a:solidFill>
-              </a:rPr>
-              <a:t>2. Publicar oferta  (POST /orquestacion/ofertas via ESB)</a:t>
-            </a:r>
-          </a:p>
-        </p:txBody>
-      </p:sp>
-      <p:sp>
-        <p:nvSpPr>
-          <p:cNvPr id="24" name="TextBox 23"/>
-          <p:cNvSpPr txBox="1"/>
-          <p:nvPr/>
-        </p:nvSpPr>
-        <p:spPr>
-          <a:xfrm>
-            <a:off x="4407408" y="3273552"/>
-            <a:ext cx="3566160" cy="658368"/>
-          </a:xfrm>
-          <a:prstGeom prst="rect">
-            <a:avLst/>
-          </a:prstGeom>
-          <a:noFill/>
-        </p:spPr>
-        <p:txBody>
-          <a:bodyPr wrap="square">
-            <a:spAutoFit/>
-          </a:bodyPr>
-          <a:lstStyle/>
-          <a:p>
-            <a:pPr algn="l"/>
-            <a:r>
-              <a:rPr sz="1200" b="0" i="0">
-                <a:solidFill>
-                  <a:srgbClr val="1A1A2E"/>
-                </a:solidFill>
-              </a:rPr>
-              <a:t>3. ESB valida empresa y oferta  (REST: /validacion)</a:t>
-            </a:r>
-          </a:p>
-        </p:txBody>
-      </p:sp>
-      <p:sp>
-        <p:nvSpPr>
-          <p:cNvPr id="25" name="TextBox 24"/>
-          <p:cNvSpPr txBox="1"/>
-          <p:nvPr/>
-        </p:nvSpPr>
-        <p:spPr>
-          <a:xfrm>
-            <a:off x="4407408" y="4014216"/>
-            <a:ext cx="3566160" cy="658368"/>
-          </a:xfrm>
-          <a:prstGeom prst="rect">
-            <a:avLst/>
-          </a:prstGeom>
-          <a:noFill/>
-        </p:spPr>
-        <p:txBody>
-          <a:bodyPr wrap="square">
-            <a:spAutoFit/>
-          </a:bodyPr>
-          <a:lstStyle/>
-          <a:p>
-            <a:pPr algn="l"/>
-            <a:r>
-              <a:rPr sz="1200" b="0" i="0">
-                <a:solidFill>
-                  <a:srgbClr val="1A1A2E"/>
-                </a:solidFill>
-              </a:rPr>
-              <a:t>4. ESB guarda en BD y lanza Matching  (SOAP: EjecutarMatching)</a:t>
-            </a:r>
-          </a:p>
-        </p:txBody>
-      </p:sp>
-      <p:sp>
-        <p:nvSpPr>
-          <p:cNvPr id="26" name="TextBox 25"/>
-          <p:cNvSpPr txBox="1"/>
-          <p:nvPr/>
-        </p:nvSpPr>
-        <p:spPr>
-          <a:xfrm>
-            <a:off x="4407408" y="4754880"/>
-            <a:ext cx="3566160" cy="658368"/>
-          </a:xfrm>
-          <a:prstGeom prst="rect">
-            <a:avLst/>
-          </a:prstGeom>
-          <a:noFill/>
-        </p:spPr>
-        <p:txBody>
-          <a:bodyPr wrap="square">
-            <a:spAutoFit/>
-          </a:bodyPr>
-          <a:lstStyle/>
-          <a:p>
-            <a:pPr algn="l"/>
-            <a:r>
-              <a:rPr sz="1200" b="0" i="0">
-                <a:solidFill>
-                  <a:srgbClr val="1A1A2E"/>
-                </a:solidFill>
-              </a:rPr>
-              <a:t>5. Candidatos adecuados reciben email automático</a:t>
-            </a:r>
-          </a:p>
-        </p:txBody>
-      </p:sp>
-      <p:sp>
-        <p:nvSpPr>
-          <p:cNvPr id="27" name="TextBox 26"/>
-          <p:cNvSpPr txBox="1"/>
-          <p:nvPr/>
-        </p:nvSpPr>
-        <p:spPr>
-          <a:xfrm>
-            <a:off x="4407408" y="5495544"/>
-            <a:ext cx="3566160" cy="658368"/>
-          </a:xfrm>
-          <a:prstGeom prst="rect">
-            <a:avLst/>
-          </a:prstGeom>
-          <a:noFill/>
-        </p:spPr>
-        <p:txBody>
-          <a:bodyPr wrap="square">
-            <a:spAutoFit/>
-          </a:bodyPr>
-          <a:lstStyle/>
-          <a:p>
-            <a:pPr algn="l"/>
-            <a:r>
-              <a:rPr sz="1200" b="0" i="0">
-                <a:solidFill>
-                  <a:srgbClr val="1A1A2E"/>
-                </a:solidFill>
-              </a:rPr>
-              <a:t>6. Empresa recibe confirmación de publicación</a:t>
-            </a:r>
-          </a:p>
-        </p:txBody>
-      </p:sp>
-      <p:sp>
-        <p:nvSpPr>
-          <p:cNvPr id="28" name="Rectangle 27"/>
-          <p:cNvSpPr/>
-          <p:nvPr/>
-        </p:nvSpPr>
-        <p:spPr>
-          <a:xfrm>
-            <a:off x="8220456" y="1234440"/>
-            <a:ext cx="3840480" cy="438912"/>
-          </a:xfrm>
-          <a:prstGeom prst="rect">
-            <a:avLst/>
-          </a:prstGeom>
-          <a:solidFill>
-            <a:srgbClr val="8E44AD"/>
-          </a:solidFill>
-          <a:ln>
-            <a:noFill/>
-          </a:ln>
-        </p:spPr>
-        <p:style>
-          <a:lnRef idx="1">
-            <a:schemeClr val="accent1"/>
-          </a:lnRef>
-          <a:fillRef idx="3">
-            <a:schemeClr val="accent1"/>
-          </a:fillRef>
-          <a:effectRef idx="2">
-            <a:schemeClr val="accent1"/>
-          </a:effectRef>
-          <a:fontRef idx="minor">
-            <a:schemeClr val="lt1"/>
-          </a:fontRef>
-        </p:style>
-        <p:txBody>
-          <a:bodyPr rtlCol="0" anchor="ctr"/>
-          <a:lstStyle/>
-          <a:p>
-            <a:pPr algn="ctr"/>
-            <a:endParaRPr/>
-          </a:p>
-        </p:txBody>
-      </p:sp>
-      <p:sp>
-        <p:nvSpPr>
-          <p:cNvPr id="29" name="TextBox 28"/>
-          <p:cNvSpPr txBox="1"/>
-          <p:nvPr/>
-        </p:nvSpPr>
-        <p:spPr>
-          <a:xfrm>
-            <a:off x="8311896" y="1261872"/>
-            <a:ext cx="3657600" cy="384048"/>
-          </a:xfrm>
-          <a:prstGeom prst="rect">
-            <a:avLst/>
-          </a:prstGeom>
-          <a:noFill/>
-        </p:spPr>
-        <p:txBody>
-          <a:bodyPr wrap="square">
-            <a:spAutoFit/>
-          </a:bodyPr>
-          <a:lstStyle/>
-          <a:p>
-            <a:pPr algn="l"/>
-            <a:r>
-              <a:rPr sz="1300" b="1" i="0">
-                <a:solidFill>
-                  <a:srgbClr val="FFFFFF"/>
-                </a:solidFill>
-              </a:rPr>
-              <a:t>Escenario 3 – Administrador</a:t>
-            </a:r>
-          </a:p>
-        </p:txBody>
-      </p:sp>
-      <p:sp>
-        <p:nvSpPr>
-          <p:cNvPr id="30" name="Rectangle 29"/>
-          <p:cNvSpPr/>
-          <p:nvPr/>
-        </p:nvSpPr>
-        <p:spPr>
-          <a:xfrm>
-            <a:off x="8220456" y="1673352"/>
-            <a:ext cx="3840480" cy="4681728"/>
-          </a:xfrm>
-          <a:prstGeom prst="rect">
-            <a:avLst/>
-          </a:prstGeom>
-          <a:solidFill>
-            <a:srgbClr val="FFFFFF"/>
-          </a:solidFill>
-          <a:ln w="12700">
-            <a:solidFill>
-              <a:srgbClr val="CCD6E0"/>
-            </a:solidFill>
-          </a:ln>
-        </p:spPr>
-        <p:style>
-          <a:lnRef idx="1">
-            <a:schemeClr val="accent1"/>
-          </a:lnRef>
-          <a:fillRef idx="3">
-            <a:schemeClr val="accent1"/>
-          </a:fillRef>
-          <a:effectRef idx="2">
-            <a:schemeClr val="accent1"/>
-          </a:effectRef>
-          <a:fontRef idx="minor">
-            <a:schemeClr val="lt1"/>
-          </a:fontRef>
-        </p:style>
-        <p:txBody>
-          <a:bodyPr rtlCol="0" anchor="ctr"/>
-          <a:lstStyle/>
-          <a:p>
-            <a:pPr algn="ctr"/>
-            <a:endParaRPr/>
-          </a:p>
-        </p:txBody>
-      </p:sp>
-      <p:sp>
-        <p:nvSpPr>
-          <p:cNvPr id="31" name="TextBox 30"/>
-          <p:cNvSpPr txBox="1"/>
-          <p:nvPr/>
-        </p:nvSpPr>
-        <p:spPr>
-          <a:xfrm>
-            <a:off x="8357616" y="1792224"/>
-            <a:ext cx="3566160" cy="658368"/>
-          </a:xfrm>
-          <a:prstGeom prst="rect">
-            <a:avLst/>
-          </a:prstGeom>
-          <a:noFill/>
-        </p:spPr>
-        <p:txBody>
-          <a:bodyPr wrap="square">
-            <a:spAutoFit/>
-          </a:bodyPr>
-          <a:lstStyle/>
-          <a:p>
-            <a:pPr algn="l"/>
-            <a:r>
-              <a:rPr sz="1200" b="0" i="0">
-                <a:solidFill>
-                  <a:srgbClr val="1A1A2E"/>
-                </a:solidFill>
-              </a:rPr>
-              <a:t>1. Login como ADMINISTRADOR  (SOAP: AutenticarUsuario)</a:t>
-            </a:r>
-          </a:p>
-        </p:txBody>
-      </p:sp>
-      <p:sp>
-        <p:nvSpPr>
-          <p:cNvPr id="32" name="TextBox 31"/>
-          <p:cNvSpPr txBox="1"/>
-          <p:nvPr/>
-        </p:nvSpPr>
-        <p:spPr>
-          <a:xfrm>
-            <a:off x="8357616" y="2532888"/>
-            <a:ext cx="3566160" cy="658368"/>
-          </a:xfrm>
-          <a:prstGeom prst="rect">
-            <a:avLst/>
-          </a:prstGeom>
-          <a:noFill/>
-        </p:spPr>
-        <p:txBody>
-          <a:bodyPr wrap="square">
-            <a:spAutoFit/>
-          </a:bodyPr>
-          <a:lstStyle/>
-          <a:p>
-            <a:pPr algn="l"/>
-            <a:r>
-              <a:rPr sz="1200" b="0" i="0">
-                <a:solidFill>
-                  <a:srgbClr val="1A1A2E"/>
-                </a:solidFill>
-              </a:rPr>
-              <a:t>2. Consultar certificados pendientes</a:t>
-            </a:r>
-          </a:p>
-        </p:txBody>
-      </p:sp>
-      <p:sp>
-        <p:nvSpPr>
-          <p:cNvPr id="33" name="TextBox 32"/>
-          <p:cNvSpPr txBox="1"/>
-          <p:nvPr/>
-        </p:nvSpPr>
-        <p:spPr>
-          <a:xfrm>
-            <a:off x="8357616" y="3273552"/>
-            <a:ext cx="3566160" cy="658368"/>
-          </a:xfrm>
-          <a:prstGeom prst="rect">
-            <a:avLst/>
-          </a:prstGeom>
-          <a:noFill/>
-        </p:spPr>
-        <p:txBody>
-          <a:bodyPr wrap="square">
-            <a:spAutoFit/>
-          </a:bodyPr>
-          <a:lstStyle/>
-          <a:p>
-            <a:pPr algn="l"/>
-            <a:r>
-              <a:rPr sz="1200" b="0" i="0">
-                <a:solidFill>
-                  <a:srgbClr val="1A1A2E"/>
-                </a:solidFill>
-              </a:rPr>
-              <a:t>3. Aprobar certificado  (SOAP: MarcarCertificado)</a:t>
-            </a:r>
-          </a:p>
-        </p:txBody>
-      </p:sp>
-      <p:sp>
-        <p:nvSpPr>
-          <p:cNvPr id="34" name="TextBox 33"/>
-          <p:cNvSpPr txBox="1"/>
-          <p:nvPr/>
-        </p:nvSpPr>
-        <p:spPr>
-          <a:xfrm>
-            <a:off x="8357616" y="4014216"/>
-            <a:ext cx="3566160" cy="658368"/>
-          </a:xfrm>
-          <a:prstGeom prst="rect">
-            <a:avLst/>
-          </a:prstGeom>
-          <a:noFill/>
-        </p:spPr>
-        <p:txBody>
-          <a:bodyPr wrap="square">
-            <a:spAutoFit/>
-          </a:bodyPr>
-          <a:lstStyle/>
-          <a:p>
-            <a:pPr algn="l"/>
-            <a:r>
-              <a:rPr sz="1200" b="0" i="0">
-                <a:solidFill>
-                  <a:srgbClr val="1A1A2E"/>
-                </a:solidFill>
-              </a:rPr>
-              <a:t>4. Ciudadano recibe email con código de verificación</a:t>
-            </a:r>
-          </a:p>
-        </p:txBody>
-      </p:sp>
-      <p:sp>
-        <p:nvSpPr>
-          <p:cNvPr id="35" name="TextBox 34"/>
-          <p:cNvSpPr txBox="1"/>
-          <p:nvPr/>
-        </p:nvSpPr>
-        <p:spPr>
-          <a:xfrm>
-            <a:off x="8357616" y="4754880"/>
-            <a:ext cx="3566160" cy="658368"/>
-          </a:xfrm>
-          <a:prstGeom prst="rect">
-            <a:avLst/>
-          </a:prstGeom>
-          <a:noFill/>
-        </p:spPr>
-        <p:txBody>
-          <a:bodyPr wrap="square">
-            <a:spAutoFit/>
-          </a:bodyPr>
-          <a:lstStyle/>
-          <a:p>
-            <a:pPr algn="l"/>
-            <a:r>
-              <a:rPr sz="1200" b="0" i="0">
-                <a:solidFill>
-                  <a:srgbClr val="1A1A2E"/>
-                </a:solidFill>
-              </a:rPr>
-              <a:t>5. Gestionar usuarios y empresas  (REST: PUT /usuarios/{nif})</a:t>
-            </a:r>
-          </a:p>
-        </p:txBody>
-      </p:sp>
-      <p:sp>
-        <p:nvSpPr>
-          <p:cNvPr id="36" name="TextBox 35"/>
-          <p:cNvSpPr txBox="1"/>
-          <p:nvPr/>
-        </p:nvSpPr>
-        <p:spPr>
-          <a:xfrm>
-            <a:off x="8357616" y="5495544"/>
-            <a:ext cx="3566160" cy="658368"/>
-          </a:xfrm>
-          <a:prstGeom prst="rect">
-            <a:avLst/>
-          </a:prstGeom>
-          <a:noFill/>
-        </p:spPr>
-        <p:txBody>
-          <a:bodyPr wrap="square">
-            <a:spAutoFit/>
-          </a:bodyPr>
-          <a:lstStyle/>
-          <a:p>
-            <a:pPr algn="l"/>
-            <a:r>
-              <a:rPr sz="1200" b="0" i="0">
-                <a:solidFill>
-                  <a:srgbClr val="1A1A2E"/>
-                </a:solidFill>
-              </a:rPr>
-              <a:t>6. Ver historial de notificaciones  (REST: GET /notificaciones)</a:t>
-            </a:r>
-          </a:p>
-        </p:txBody>
-      </p:sp>
-    </p:spTree>
-  </p:cSld>
-  <p:clrMapOvr>
-    <a:masterClrMapping/>
-  </p:clrMapOvr>
-</p:sld>
-</file>
-
-<file path=ppt/slides/slide23.xml><?xml version="1.0" encoding="utf-8"?>
-<p:sld xmlns:a="http://schemas.openxmlformats.org/drawingml/2006/main" xmlns:r="http://schemas.openxmlformats.org/officeDocument/2006/relationships" xmlns:p="http://schemas.openxmlformats.org/presentationml/2006/main">
-  <p:cSld>
-    <p:spTree>
-      <p:nvGrpSpPr>
-        <p:cNvPr id="1" name=""/>
-        <p:cNvGrpSpPr/>
-        <p:nvPr/>
-      </p:nvGrpSpPr>
-      <p:grpSpPr>
-        <a:xfrm>
-          <a:off x="0" y="0"/>
-          <a:ext cx="0" cy="0"/>
-          <a:chOff x="0" y="0"/>
-          <a:chExt cx="0" cy="0"/>
-        </a:xfrm>
-      </p:grpSpPr>
-      <p:sp>
-        <p:nvSpPr>
-          <p:cNvPr id="2" name="Rectangle 1"/>
-          <p:cNvSpPr/>
-          <p:nvPr/>
-        </p:nvSpPr>
-        <p:spPr>
-          <a:xfrm>
-            <a:off x="0" y="0"/>
-            <a:ext cx="12188952" cy="6858000"/>
-          </a:xfrm>
-          <a:prstGeom prst="rect">
-            <a:avLst/>
-          </a:prstGeom>
-          <a:solidFill>
             <a:srgbClr val="002B6A"/>
           </a:solidFill>
           <a:ln>
@@ -37815,7 +36371,7 @@
           <a:p>
             <a:pPr algn="l"/>
             <a:r>
-              <a:rPr sz="1000" b="1" i="0">
+              <a:rPr sz="1000" b="1" i="0" dirty="0">
                 <a:solidFill>
                   <a:srgbClr val="FFFFFF"/>
                 </a:solidFill>
@@ -38051,12 +36607,36 @@
           <a:p>
             <a:pPr algn="l"/>
             <a:r>
-              <a:rPr sz="1000" b="1" i="0">
+              <a:rPr sz="1000" b="1" i="0" dirty="0" err="1">
                 <a:solidFill>
                   <a:srgbClr val="FFFFFF"/>
                 </a:solidFill>
               </a:rPr>
-              <a:t>Autenticación vía NIF/NIE</a:t>
+              <a:t>Autenticación</a:t>
+            </a:r>
+            <a:r>
+              <a:rPr sz="1000" b="1" i="0" dirty="0">
+                <a:solidFill>
+                  <a:srgbClr val="FFFFFF"/>
+                </a:solidFill>
+              </a:rPr>
+              <a:t> </a:t>
+            </a:r>
+            <a:r>
+              <a:rPr sz="1000" b="1" i="0" dirty="0" err="1">
+                <a:solidFill>
+                  <a:srgbClr val="FFFFFF"/>
+                </a:solidFill>
+              </a:rPr>
+              <a:t>vía</a:t>
+            </a:r>
+            <a:r>
+              <a:rPr sz="1000" b="1" i="0" dirty="0">
+                <a:solidFill>
+                  <a:srgbClr val="FFFFFF"/>
+                </a:solidFill>
+              </a:rPr>
+              <a:t> NIF/NIE</a:t>
             </a:r>
           </a:p>
         </p:txBody>
@@ -39227,7 +37807,7 @@
           <a:p>
             <a:pPr algn="l"/>
             <a:r>
-              <a:rPr sz="1000" b="1" i="0">
+              <a:rPr sz="1000" b="1" i="0" dirty="0">
                 <a:solidFill>
                   <a:srgbClr val="FFFFFF"/>
                 </a:solidFill>
